--- a/DSA-3_Project PPT (2).pptx
+++ b/DSA-3_Project PPT (2).pptx
@@ -125,7 +125,7 @@
 <file path=ppt/revisionInfo.xml><?xml version="1.0" encoding="utf-8"?>
 <p1510:revInfo xmlns:a="http://schemas.openxmlformats.org/drawingml/2006/main" xmlns:r="http://schemas.openxmlformats.org/officeDocument/2006/relationships" xmlns:p1510="http://schemas.microsoft.com/office/powerpoint/2015/10/main">
   <p1510:revLst>
-    <p1510:client id="{E866F468-EA98-440E-8573-548EAFAEF65E}" v="46" dt="2026-08-31T02:50:33.440"/>
+    <p1510:client id="{E866F468-EA98-440E-8573-548EAFAEF65E}" v="48" dt="2026-09-28T07:26:27.484"/>
   </p1510:revLst>
 </p1510:revInfo>
 </file>
@@ -135,7 +135,7 @@
   <pc:docChgLst>
     <pc:chgData name="Satwik Reddy" userId="6f2337c6a38ffec0" providerId="LiveId" clId="{56C06E96-0843-4EB2-911C-3B7F93165ACD}"/>
     <pc:docChg chg="undo custSel delSld modSld sldOrd">
-      <pc:chgData name="Satwik Reddy" userId="6f2337c6a38ffec0" providerId="LiveId" clId="{56C06E96-0843-4EB2-911C-3B7F93165ACD}" dt="2026-08-31T06:47:54.881" v="476" actId="20577"/>
+      <pc:chgData name="Satwik Reddy" userId="6f2337c6a38ffec0" providerId="LiveId" clId="{56C06E96-0843-4EB2-911C-3B7F93165ACD}" dt="2026-09-28T08:59:06.373" v="482" actId="1076"/>
       <pc:docMkLst>
         <pc:docMk/>
       </pc:docMkLst>
@@ -163,35 +163,11 @@
         </pc:spChg>
       </pc:sldChg>
       <pc:sldChg chg="addSp delSp modSp mod">
-        <pc:chgData name="Satwik Reddy" userId="6f2337c6a38ffec0" providerId="LiveId" clId="{56C06E96-0843-4EB2-911C-3B7F93165ACD}" dt="2026-08-31T02:48:32.487" v="408" actId="113"/>
+        <pc:chgData name="Satwik Reddy" userId="6f2337c6a38ffec0" providerId="LiveId" clId="{56C06E96-0843-4EB2-911C-3B7F93165ACD}" dt="2026-09-28T07:26:27.484" v="478" actId="20578"/>
         <pc:sldMkLst>
           <pc:docMk/>
           <pc:sldMk cId="0" sldId="258"/>
         </pc:sldMkLst>
-        <pc:spChg chg="add del">
-          <ac:chgData name="Satwik Reddy" userId="6f2337c6a38ffec0" providerId="LiveId" clId="{56C06E96-0843-4EB2-911C-3B7F93165ACD}" dt="2026-08-30T18:44:13.119" v="306" actId="478"/>
-          <ac:spMkLst>
-            <pc:docMk/>
-            <pc:sldMk cId="0" sldId="258"/>
-            <ac:spMk id="4" creationId="{326288C7-EDFA-6F8F-CD63-20D0877663E6}"/>
-          </ac:spMkLst>
-        </pc:spChg>
-        <pc:spChg chg="add del mod">
-          <ac:chgData name="Satwik Reddy" userId="6f2337c6a38ffec0" providerId="LiveId" clId="{56C06E96-0843-4EB2-911C-3B7F93165ACD}" dt="2026-08-30T18:45:04.162" v="327" actId="478"/>
-          <ac:spMkLst>
-            <pc:docMk/>
-            <pc:sldMk cId="0" sldId="258"/>
-            <ac:spMk id="5" creationId="{B7978617-E580-5D6B-C6E0-59DFDA396D26}"/>
-          </ac:spMkLst>
-        </pc:spChg>
-        <pc:spChg chg="add del">
-          <ac:chgData name="Satwik Reddy" userId="6f2337c6a38ffec0" providerId="LiveId" clId="{56C06E96-0843-4EB2-911C-3B7F93165ACD}" dt="2026-08-30T18:44:47.443" v="310" actId="22"/>
-          <ac:spMkLst>
-            <pc:docMk/>
-            <pc:sldMk cId="0" sldId="258"/>
-            <ac:spMk id="7" creationId="{8BD84656-EA90-02FF-A5F9-BD943E74A756}"/>
-          </ac:spMkLst>
-        </pc:spChg>
         <pc:spChg chg="add mod">
           <ac:chgData name="Satwik Reddy" userId="6f2337c6a38ffec0" providerId="LiveId" clId="{56C06E96-0843-4EB2-911C-3B7F93165ACD}" dt="2026-08-30T18:45:28.350" v="330"/>
           <ac:spMkLst>
@@ -200,16 +176,8 @@
             <ac:spMk id="8" creationId="{9E2B55A3-20A0-0036-9D29-3BC9F7DF5BEA}"/>
           </ac:spMkLst>
         </pc:spChg>
-        <pc:spChg chg="add del mod">
-          <ac:chgData name="Satwik Reddy" userId="6f2337c6a38ffec0" providerId="LiveId" clId="{56C06E96-0843-4EB2-911C-3B7F93165ACD}" dt="2026-08-30T18:47:17.406" v="389"/>
-          <ac:spMkLst>
-            <pc:docMk/>
-            <pc:sldMk cId="0" sldId="258"/>
-            <ac:spMk id="9" creationId="{2A52E2E1-0904-9081-7099-6DE5B808FA82}"/>
-          </ac:spMkLst>
-        </pc:spChg>
         <pc:spChg chg="add mod">
-          <ac:chgData name="Satwik Reddy" userId="6f2337c6a38ffec0" providerId="LiveId" clId="{56C06E96-0843-4EB2-911C-3B7F93165ACD}" dt="2026-08-31T02:48:32.487" v="408" actId="113"/>
+          <ac:chgData name="Satwik Reddy" userId="6f2337c6a38ffec0" providerId="LiveId" clId="{56C06E96-0843-4EB2-911C-3B7F93165ACD}" dt="2026-09-28T07:26:27.484" v="478" actId="20578"/>
           <ac:spMkLst>
             <pc:docMk/>
             <pc:sldMk cId="0" sldId="258"/>
@@ -218,13 +186,13 @@
         </pc:spChg>
       </pc:sldChg>
       <pc:sldChg chg="addSp modSp mod">
-        <pc:chgData name="Satwik Reddy" userId="6f2337c6a38ffec0" providerId="LiveId" clId="{56C06E96-0843-4EB2-911C-3B7F93165ACD}" dt="2026-08-31T05:03:02.081" v="423" actId="1076"/>
+        <pc:chgData name="Satwik Reddy" userId="6f2337c6a38ffec0" providerId="LiveId" clId="{56C06E96-0843-4EB2-911C-3B7F93165ACD}" dt="2026-09-28T08:59:06.373" v="482" actId="1076"/>
         <pc:sldMkLst>
           <pc:docMk/>
           <pc:sldMk cId="0" sldId="259"/>
         </pc:sldMkLst>
         <pc:picChg chg="add mod">
-          <ac:chgData name="Satwik Reddy" userId="6f2337c6a38ffec0" providerId="LiveId" clId="{56C06E96-0843-4EB2-911C-3B7F93165ACD}" dt="2026-08-31T05:03:02.081" v="423" actId="1076"/>
+          <ac:chgData name="Satwik Reddy" userId="6f2337c6a38ffec0" providerId="LiveId" clId="{56C06E96-0843-4EB2-911C-3B7F93165ACD}" dt="2026-09-28T08:59:06.373" v="482" actId="1076"/>
           <ac:picMkLst>
             <pc:docMk/>
             <pc:sldMk cId="0" sldId="259"/>
@@ -253,14 +221,6 @@
           <pc:docMk/>
           <pc:sldMk cId="0" sldId="261"/>
         </pc:sldMkLst>
-        <pc:spChg chg="add del mod">
-          <ac:chgData name="Satwik Reddy" userId="6f2337c6a38ffec0" providerId="LiveId" clId="{56C06E96-0843-4EB2-911C-3B7F93165ACD}" dt="2026-08-31T02:46:59.831" v="399"/>
-          <ac:spMkLst>
-            <pc:docMk/>
-            <pc:sldMk cId="0" sldId="261"/>
-            <ac:spMk id="4" creationId="{59CAB88A-9CEC-F1B5-022C-D2DC2E9B1E84}"/>
-          </ac:spMkLst>
-        </pc:spChg>
         <pc:spChg chg="add mod">
           <ac:chgData name="Satwik Reddy" userId="6f2337c6a38ffec0" providerId="LiveId" clId="{56C06E96-0843-4EB2-911C-3B7F93165ACD}" dt="2026-08-31T02:48:43.385" v="409" actId="113"/>
           <ac:spMkLst>
@@ -291,60 +251,12 @@
           <pc:docMk/>
           <pc:sldMk cId="1672422596" sldId="264"/>
         </pc:sldMkLst>
-        <pc:spChg chg="add del mod">
-          <ac:chgData name="Satwik Reddy" userId="6f2337c6a38ffec0" providerId="LiveId" clId="{56C06E96-0843-4EB2-911C-3B7F93165ACD}" dt="2026-08-30T18:41:25.541" v="288" actId="478"/>
-          <ac:spMkLst>
-            <pc:docMk/>
-            <pc:sldMk cId="1672422596" sldId="264"/>
-            <ac:spMk id="4" creationId="{D28405F2-F71A-DEF6-C5E5-67711DBB3CEB}"/>
-          </ac:spMkLst>
-        </pc:spChg>
-        <pc:spChg chg="add">
-          <ac:chgData name="Satwik Reddy" userId="6f2337c6a38ffec0" providerId="LiveId" clId="{56C06E96-0843-4EB2-911C-3B7F93165ACD}" dt="2026-08-30T18:41:17.720" v="286"/>
-          <ac:spMkLst>
-            <pc:docMk/>
-            <pc:sldMk cId="1672422596" sldId="264"/>
-            <ac:spMk id="5" creationId="{593E35D7-A737-EC33-9762-40C94CF0E002}"/>
-          </ac:spMkLst>
-        </pc:spChg>
-        <pc:spChg chg="add del">
-          <ac:chgData name="Satwik Reddy" userId="6f2337c6a38ffec0" providerId="LiveId" clId="{56C06E96-0843-4EB2-911C-3B7F93165ACD}" dt="2026-08-30T18:41:25.541" v="288" actId="478"/>
-          <ac:spMkLst>
-            <pc:docMk/>
-            <pc:sldMk cId="1672422596" sldId="264"/>
-            <ac:spMk id="6" creationId="{2C7566F9-2DAE-9115-1F55-2B7064847D24}"/>
-          </ac:spMkLst>
-        </pc:spChg>
-        <pc:spChg chg="add mod">
-          <ac:chgData name="Satwik Reddy" userId="6f2337c6a38ffec0" providerId="LiveId" clId="{56C06E96-0843-4EB2-911C-3B7F93165ACD}" dt="2026-08-30T18:41:54.406" v="291" actId="1076"/>
-          <ac:spMkLst>
-            <pc:docMk/>
-            <pc:sldMk cId="1672422596" sldId="264"/>
-            <ac:spMk id="7" creationId="{B741D208-5FA9-01C2-4BA0-E1B69CA37677}"/>
-          </ac:spMkLst>
-        </pc:spChg>
-        <pc:spChg chg="add del mod">
-          <ac:chgData name="Satwik Reddy" userId="6f2337c6a38ffec0" providerId="LiveId" clId="{56C06E96-0843-4EB2-911C-3B7F93165ACD}" dt="2026-08-30T18:43:05.283" v="304"/>
-          <ac:spMkLst>
-            <pc:docMk/>
-            <pc:sldMk cId="1672422596" sldId="264"/>
-            <ac:spMk id="8" creationId="{9FA87934-31FC-D7DE-3E46-2398AC3C1E88}"/>
-          </ac:spMkLst>
-        </pc:spChg>
         <pc:spChg chg="add mod">
           <ac:chgData name="Satwik Reddy" userId="6f2337c6a38ffec0" providerId="LiveId" clId="{56C06E96-0843-4EB2-911C-3B7F93165ACD}" dt="2026-08-31T02:48:13.052" v="406" actId="2711"/>
           <ac:spMkLst>
             <pc:docMk/>
             <pc:sldMk cId="1672422596" sldId="264"/>
             <ac:spMk id="9" creationId="{B84B4C72-AA7A-03EC-B392-65AD507A2F2E}"/>
-          </ac:spMkLst>
-        </pc:spChg>
-        <pc:spChg chg="add">
-          <ac:chgData name="Satwik Reddy" userId="6f2337c6a38ffec0" providerId="LiveId" clId="{56C06E96-0843-4EB2-911C-3B7F93165ACD}" dt="2026-08-30T18:44:37.835" v="308"/>
-          <ac:spMkLst>
-            <pc:docMk/>
-            <pc:sldMk cId="1672422596" sldId="264"/>
-            <ac:spMk id="10" creationId="{29EDAE1E-A381-C6A4-903B-54112826421C}"/>
           </ac:spMkLst>
         </pc:spChg>
       </pc:sldChg>
@@ -384,14 +296,6 @@
           <pc:docMk/>
           <pc:sldMk cId="106092222" sldId="267"/>
         </pc:sldMkLst>
-        <pc:spChg chg="add mod">
-          <ac:chgData name="Satwik Reddy" userId="6f2337c6a38ffec0" providerId="LiveId" clId="{56C06E96-0843-4EB2-911C-3B7F93165ACD}" dt="2026-08-31T04:48:46.489" v="420" actId="255"/>
-          <ac:spMkLst>
-            <pc:docMk/>
-            <pc:sldMk cId="106092222" sldId="267"/>
-            <ac:spMk id="4" creationId="{60B63C04-E187-F0BC-1E79-8514F5147351}"/>
-          </ac:spMkLst>
-        </pc:spChg>
       </pc:sldChg>
     </pc:docChg>
   </pc:docChgLst>
@@ -541,7 +445,7 @@
           <a:p>
             <a:fld id="{45B1BC09-D557-492E-9C5D-E4CF9E078DE2}" type="datetimeFigureOut">
               <a:rPr lang="en-US" smtClean="0"/>
-              <a:t>8/31/2026</a:t>
+              <a:t>9/28/2026</a:t>
             </a:fld>
             <a:endParaRPr lang="en-US"/>
           </a:p>
@@ -744,7 +648,7 @@
           <a:p>
             <a:fld id="{45B1BC09-D557-492E-9C5D-E4CF9E078DE2}" type="datetimeFigureOut">
               <a:rPr lang="en-US" smtClean="0"/>
-              <a:t>8/31/2026</a:t>
+              <a:t>9/28/2026</a:t>
             </a:fld>
             <a:endParaRPr lang="en-US"/>
           </a:p>
@@ -947,7 +851,7 @@
           <a:p>
             <a:fld id="{45B1BC09-D557-492E-9C5D-E4CF9E078DE2}" type="datetimeFigureOut">
               <a:rPr lang="en-US" smtClean="0"/>
-              <a:t>8/31/2026</a:t>
+              <a:t>9/28/2026</a:t>
             </a:fld>
             <a:endParaRPr lang="en-US"/>
           </a:p>
@@ -1150,7 +1054,7 @@
           <a:p>
             <a:fld id="{45B1BC09-D557-492E-9C5D-E4CF9E078DE2}" type="datetimeFigureOut">
               <a:rPr lang="en-US" smtClean="0"/>
-              <a:t>8/31/2026</a:t>
+              <a:t>9/28/2026</a:t>
             </a:fld>
             <a:endParaRPr lang="en-US"/>
           </a:p>
@@ -1420,7 +1324,7 @@
           <a:p>
             <a:fld id="{45B1BC09-D557-492E-9C5D-E4CF9E078DE2}" type="datetimeFigureOut">
               <a:rPr lang="en-US" smtClean="0"/>
-              <a:t>8/31/2026</a:t>
+              <a:t>9/28/2026</a:t>
             </a:fld>
             <a:endParaRPr lang="en-US"/>
           </a:p>
@@ -1682,7 +1586,7 @@
           <a:p>
             <a:fld id="{45B1BC09-D557-492E-9C5D-E4CF9E078DE2}" type="datetimeFigureOut">
               <a:rPr lang="en-US" smtClean="0"/>
-              <a:t>8/31/2026</a:t>
+              <a:t>9/28/2026</a:t>
             </a:fld>
             <a:endParaRPr lang="en-US"/>
           </a:p>
@@ -2080,7 +1984,7 @@
           <a:p>
             <a:fld id="{45B1BC09-D557-492E-9C5D-E4CF9E078DE2}" type="datetimeFigureOut">
               <a:rPr lang="en-US" smtClean="0"/>
-              <a:t>8/31/2026</a:t>
+              <a:t>9/28/2026</a:t>
             </a:fld>
             <a:endParaRPr lang="en-US"/>
           </a:p>
@@ -2224,7 +2128,7 @@
           <a:p>
             <a:fld id="{45B1BC09-D557-492E-9C5D-E4CF9E078DE2}" type="datetimeFigureOut">
               <a:rPr lang="en-US" smtClean="0"/>
-              <a:t>8/31/2026</a:t>
+              <a:t>9/28/2026</a:t>
             </a:fld>
             <a:endParaRPr lang="en-US"/>
           </a:p>
@@ -2338,7 +2242,7 @@
           <a:p>
             <a:fld id="{45B1BC09-D557-492E-9C5D-E4CF9E078DE2}" type="datetimeFigureOut">
               <a:rPr lang="en-US" smtClean="0"/>
-              <a:t>8/31/2026</a:t>
+              <a:t>9/28/2026</a:t>
             </a:fld>
             <a:endParaRPr lang="en-US"/>
           </a:p>
@@ -2641,7 +2545,7 @@
           <a:p>
             <a:fld id="{45B1BC09-D557-492E-9C5D-E4CF9E078DE2}" type="datetimeFigureOut">
               <a:rPr lang="en-US" smtClean="0"/>
-              <a:t>8/31/2026</a:t>
+              <a:t>9/28/2026</a:t>
             </a:fld>
             <a:endParaRPr lang="en-US"/>
           </a:p>
@@ -2921,7 +2825,7 @@
           <a:p>
             <a:fld id="{45B1BC09-D557-492E-9C5D-E4CF9E078DE2}" type="datetimeFigureOut">
               <a:rPr lang="en-US" smtClean="0"/>
-              <a:t>8/31/2026</a:t>
+              <a:t>9/28/2026</a:t>
             </a:fld>
             <a:endParaRPr lang="en-US"/>
           </a:p>
